--- a/management-seminars/week11_timeline_planning.pptx
+++ b/management-seminars/week11_timeline_planning.pptx
@@ -11,6 +11,7 @@
     <p:sldId id="269" r:id="rId20"/>
     <p:sldId id="270" r:id="rId21"/>
     <p:sldId id="271" r:id="rId22"/>
+    <p:sldId id="272" r:id="rId11"/>
   </p:sldIdLst>
   <p:notesMasterIdLst>
     <p:notesMasterId r:id="rId12"/>
@@ -857,6 +858,76 @@
           <a:p>
             <a:r>
               <a:t>"We worked on the model" says little; "the model is validated; the deck is at risk because finance data is late" lets a sponsor act. A date promised before the work is understood is a guess.</a:t>
+            </a:r>
+          </a:p>
+        </p:txBody>
+      </p:sp>
+      <p:sp>
+        <p:nvSpPr>
+          <p:cNvPr id="4" name="Slide Number Placeholder 3"/>
+          <p:cNvSpPr>
+            <a:spLocks noGrp="1"/>
+          </p:cNvSpPr>
+          <p:nvPr>
+            <p:ph type="sldNum" idx="5" sz="quarter"/>
+          </p:nvPr>
+        </p:nvSpPr>
+        <p:spPr/>
+      </p:sp>
+    </p:spTree>
+  </p:cSld>
+  <p:clrMapOvr>
+    <a:masterClrMapping/>
+  </p:clrMapOvr>
+</p:notes>
+</file>
+
+<file path=ppt/notesSlides/notesSlide7.xml><?xml version="1.0" encoding="utf-8"?>
+<p:notes xmlns:a="http://schemas.openxmlformats.org/drawingml/2006/main" xmlns:p="http://schemas.openxmlformats.org/presentationml/2006/main" xmlns:r="http://schemas.openxmlformats.org/officeDocument/2006/relationships">
+  <p:cSld>
+    <p:spTree>
+      <p:nvGrpSpPr>
+        <p:cNvPr id="1" name=""/>
+        <p:cNvGrpSpPr/>
+        <p:nvPr/>
+      </p:nvGrpSpPr>
+      <p:grpSpPr>
+        <a:xfrm>
+          <a:off x="0" y="0"/>
+          <a:ext cx="0" cy="0"/>
+          <a:chOff x="0" y="0"/>
+          <a:chExt cx="0" cy="0"/>
+        </a:xfrm>
+      </p:grpSpPr>
+      <p:sp>
+        <p:nvSpPr>
+          <p:cNvPr id="2" name="Slide Image Placeholder 1"/>
+          <p:cNvSpPr>
+            <a:spLocks noGrp="1"/>
+          </p:cNvSpPr>
+          <p:nvPr>
+            <p:ph type="sldImg" idx="2"/>
+          </p:nvPr>
+        </p:nvSpPr>
+        <p:spPr/>
+      </p:sp>
+      <p:sp>
+        <p:nvSpPr>
+          <p:cNvPr id="3" name="Notes Placeholder 2"/>
+          <p:cNvSpPr>
+            <a:spLocks noGrp="1"/>
+          </p:cNvSpPr>
+          <p:nvPr>
+            <p:ph type="body" idx="3" sz="quarter"/>
+          </p:nvPr>
+        </p:nvSpPr>
+        <p:spPr/>
+        <p:txBody>
+          <a:bodyPr/>
+          <a:lstStyle/>
+          <a:p>
+            <a:r>
+              <a:t>Give students a few minutes to write an answer drawn from their own experience and career, then ask two or three to share. Connect their examples back to this seminar's content. In an online section, post the same question to the discussion board.</a:t>
             </a:r>
           </a:p>
         </p:txBody>
@@ -1506,7 +1577,7 @@
 </p:sldMaster>
 </file>
 
-<file path=ppt/slides/slide11.xml><?xml version="1.0" encoding="utf-8"?>
+<file path=ppt/slides/slide1.xml><?xml version="1.0" encoding="utf-8"?>
 <p:sld xmlns:a="http://schemas.openxmlformats.org/drawingml/2006/main" xmlns:p="http://schemas.openxmlformats.org/presentationml/2006/main" xmlns:r="http://schemas.openxmlformats.org/officeDocument/2006/relationships">
   <p:cSld>
     <p:spTree>
@@ -1600,7 +1671,7 @@
 </p:sld>
 </file>
 
-<file path=ppt/slides/slide12.xml><?xml version="1.0" encoding="utf-8"?>
+<file path=ppt/slides/slide2.xml><?xml version="1.0" encoding="utf-8"?>
 <p:sld xmlns:a="http://schemas.openxmlformats.org/drawingml/2006/main" xmlns:p="http://schemas.openxmlformats.org/presentationml/2006/main" xmlns:r="http://schemas.openxmlformats.org/officeDocument/2006/relationships">
   <p:cSld>
     <p:spTree>
@@ -1797,7 +1868,7 @@
 </p:sld>
 </file>
 
-<file path=ppt/slides/slide13.xml><?xml version="1.0" encoding="utf-8"?>
+<file path=ppt/slides/slide3.xml><?xml version="1.0" encoding="utf-8"?>
 <p:sld xmlns:a="http://schemas.openxmlformats.org/drawingml/2006/main" xmlns:p="http://schemas.openxmlformats.org/presentationml/2006/main" xmlns:r="http://schemas.openxmlformats.org/officeDocument/2006/relationships">
   <p:cSld>
     <p:spTree>
@@ -1994,7 +2065,7 @@
 </p:sld>
 </file>
 
-<file path=ppt/slides/slide14.xml><?xml version="1.0" encoding="utf-8"?>
+<file path=ppt/slides/slide4.xml><?xml version="1.0" encoding="utf-8"?>
 <p:sld xmlns:a="http://schemas.openxmlformats.org/drawingml/2006/main" xmlns:p="http://schemas.openxmlformats.org/presentationml/2006/main" xmlns:r="http://schemas.openxmlformats.org/officeDocument/2006/relationships">
   <p:cSld>
     <p:spTree>
@@ -2191,7 +2262,7 @@
 </p:sld>
 </file>
 
-<file path=ppt/slides/slide15.xml><?xml version="1.0" encoding="utf-8"?>
+<file path=ppt/slides/slide5.xml><?xml version="1.0" encoding="utf-8"?>
 <p:sld xmlns:a="http://schemas.openxmlformats.org/drawingml/2006/main" xmlns:p="http://schemas.openxmlformats.org/presentationml/2006/main" xmlns:r="http://schemas.openxmlformats.org/officeDocument/2006/relationships">
   <p:cSld>
     <p:spTree>
@@ -2370,7 +2441,7 @@
 </p:sld>
 </file>
 
-<file path=ppt/slides/slide16.xml><?xml version="1.0" encoding="utf-8"?>
+<file path=ppt/slides/slide6.xml><?xml version="1.0" encoding="utf-8"?>
 <p:sld xmlns:a="http://schemas.openxmlformats.org/drawingml/2006/main" xmlns:p="http://schemas.openxmlformats.org/presentationml/2006/main" xmlns:r="http://schemas.openxmlformats.org/officeDocument/2006/relationships">
   <p:cSld>
     <p:spTree>
@@ -2536,6 +2607,167 @@
             <a:fld id="{F7021451-1387-4CA6-816F-3879F97B5CBC}" type="slidenum">
               <a:rPr b="0" lang="en-US"/>
               <a:t>6</a:t>
+            </a:fld>
+            <a:endParaRPr lang="en-US"/>
+          </a:p>
+        </p:txBody>
+      </p:sp>
+    </p:spTree>
+  </p:cSld>
+  <p:clrMapOvr>
+    <a:masterClrMapping/>
+  </p:clrMapOvr>
+</p:sld>
+</file>
+
+<file path=ppt/slides/slide7.xml><?xml version="1.0" encoding="utf-8"?>
+<p:sld xmlns:a="http://schemas.openxmlformats.org/drawingml/2006/main" xmlns:p="http://schemas.openxmlformats.org/presentationml/2006/main" xmlns:r="http://schemas.openxmlformats.org/officeDocument/2006/relationships">
+  <p:cSld>
+    <p:spTree>
+      <p:nvGrpSpPr>
+        <p:cNvPr id="1" name=""/>
+        <p:cNvGrpSpPr/>
+        <p:nvPr/>
+      </p:nvGrpSpPr>
+      <p:grpSpPr/>
+      <p:sp>
+        <p:nvSpPr>
+          <p:cNvPr id="2" name="Text 0"/>
+          <p:cNvSpPr/>
+          <p:nvPr>
+            <p:ph idx="100" type="title" hasCustomPrompt="1"/>
+          </p:nvPr>
+        </p:nvSpPr>
+        <p:spPr>
+          <a:xfrm>
+            <a:off x="731520" y="457200"/>
+            <a:ext cx="10698480" cy="822960"/>
+          </a:xfrm>
+          <a:prstGeom prst="rect">
+            <a:avLst/>
+          </a:prstGeom>
+          <a:noFill/>
+          <a:ln/>
+        </p:spPr>
+        <p:txBody>
+          <a:bodyPr wrap="square" lIns="0" tIns="0" rIns="0" bIns="0" rtlCol="0" anchor="t"/>
+          <a:lstStyle/>
+          <a:p>
+            <a:pPr algn="l" indent="0" marL="0">
+              <a:buNone/>
+            </a:pPr>
+            <a:r>
+              <a:rPr lang="en-US" sz="3200" b="1" dirty="0">
+                <a:solidFill>
+                  <a:srgbClr val="FFFFFF"/>
+                </a:solidFill>
+              </a:rPr>
+              <a:t>Discussion</a:t>
+            </a:r>
+            <a:endParaRPr lang="en-US" sz="3200" dirty="0"/>
+          </a:p>
+        </p:txBody>
+      </p:sp>
+      <p:sp>
+        <p:nvSpPr>
+          <p:cNvPr id="3" name="Text 0"/>
+          <p:cNvSpPr/>
+          <p:nvPr>
+            <p:ph idx="101" type="body" hasCustomPrompt="1"/>
+          </p:nvPr>
+        </p:nvSpPr>
+        <p:spPr>
+          <a:xfrm>
+            <a:off x="731520" y="1554480"/>
+            <a:ext cx="10698480" cy="4754880"/>
+          </a:xfrm>
+          <a:prstGeom prst="rect">
+            <a:avLst/>
+          </a:prstGeom>
+          <a:noFill/>
+          <a:ln/>
+        </p:spPr>
+        <p:txBody>
+          <a:bodyPr wrap="square" rtlCol="0" anchor="t"/>
+          <a:lstStyle/>
+          <a:p>
+            <a:pPr algn="l" marL="342900" indent="-342900">
+              <a:spcAft>
+                <a:spcPts val="1000"/>
+              </a:spcAft>
+              <a:buSzPct val="100000"/>
+              <a:buChar char="•"/>
+            </a:pPr>
+            <a:r>
+              <a:rPr lang="en-US" sz="2400" dirty="0">
+                <a:solidFill>
+                  <a:srgbClr val="FFFFFF"/>
+                </a:solidFill>
+              </a:rPr>
+              <a:t>Recall a project that ran late. What was on its critical path, and how would you plan and communicate it differently now?</a:t>
+            </a:r>
+            <a:endParaRPr lang="en-US" sz="2400" dirty="0"/>
+          </a:p>
+          <a:p>
+            <a:pPr algn="l" marL="342900" indent="-342900">
+              <a:spcAft>
+                <a:spcPts val="1000"/>
+              </a:spcAft>
+              <a:buSzPct val="100000"/>
+              <a:buChar char="•"/>
+            </a:pPr>
+            <a:r>
+              <a:rPr lang="en-US" sz="2400" dirty="0">
+                <a:solidFill>
+                  <a:srgbClr val="FFFFFF"/>
+                </a:solidFill>
+              </a:rPr>
+              <a:t>Draw on your own experience and career, and apply today's seminar to that setting.</a:t>
+            </a:r>
+            <a:endParaRPr lang="en-US" sz="2400" dirty="0"/>
+          </a:p>
+        </p:txBody>
+      </p:sp>
+      <p:sp>
+        <p:nvSpPr>
+          <p:cNvPr id="25" name="Slide Number Placeholder 0"/>
+          <p:cNvSpPr>
+            <a:spLocks noGrp="1"/>
+          </p:cNvSpPr>
+          <p:nvPr>
+            <p:ph type="sldNum" sz="quarter" idx="4294967295"/>
+          </p:nvPr>
+        </p:nvSpPr>
+        <p:spPr>
+          <a:xfrm>
+            <a:off x="10972800" y="6400800"/>
+            <a:ext cx="548640" cy="274320"/>
+          </a:xfrm>
+          <a:prstGeom prst="rect">
+            <a:avLst/>
+          </a:prstGeom>
+          <a:extLst>
+            <a:ext uri="{C572A759-6A51-4108-AA02-DFA0A04FC94B}">
+              <ma14:wrappingTextBoxFlag xmlns:ma14="http://schemas.microsoft.com/office/mac/drawingml/2011/main" val="0"/>
+            </a:ext>
+          </a:extLst>
+        </p:spPr>
+        <p:txBody>
+          <a:bodyPr/>
+          <a:lstStyle>
+            <a:lvl1pPr>
+              <a:defRPr sz="1000">
+                <a:solidFill>
+                  <a:srgbClr val="BFBFBF"/>
+                </a:solidFill>
+              </a:defRPr>
+            </a:lvl1pPr>
+          </a:lstStyle>
+          <a:p>
+            <a:pPr algn="r"/>
+            <a:fld id="{F7021451-1387-4CA6-816F-3879F97B5CBC}" type="slidenum">
+              <a:rPr b="0" lang="en-US"/>
+              <a:t>7</a:t>
             </a:fld>
             <a:endParaRPr lang="en-US"/>
           </a:p>

--- a/management-seminars/week11_timeline_planning.pptx
+++ b/management-seminars/week11_timeline_planning.pptx
@@ -1619,7 +1619,7 @@
                   <a:srgbClr val="FFFFFF"/>
                 </a:solidFill>
               </a:rPr>
-              <a:t>Timeline Planning and Expectation Management</a:t>
+              <a:t>Week 11: Timeline Planning and Expectation Management</a:t>
             </a:r>
             <a:endParaRPr lang="en-US" sz="4000" dirty="0"/>
           </a:p>
